--- a/01 Classes/Aula 02 - Aplicação Cloud Indústria 40 Python IoT Midlleware e Protocolos de Rede.pptx
+++ b/01 Classes/Aula 02 - Aplicação Cloud Indústria 40 Python IoT Midlleware e Protocolos de Rede.pptx
@@ -7497,7 +7497,7 @@
               <a:buChar char="§"/>
             </a:pPr>
             <a:r>
-              <a:rPr lang="pt-BR" sz="2000" dirty="0">
+              <a:rPr lang="pt-BR" sz="2000" b="1" dirty="0">
                 <a:solidFill>
                   <a:schemeClr val="tx1"/>
                 </a:solidFill>
@@ -7626,7 +7626,7 @@
               <a:buChar char="§"/>
             </a:pPr>
             <a:r>
-              <a:rPr lang="pt-BR" sz="2000" dirty="0">
+              <a:rPr lang="pt-BR" sz="2000" b="1" dirty="0">
                 <a:solidFill>
                   <a:schemeClr val="tx1"/>
                 </a:solidFill>
@@ -7678,7 +7678,7 @@
               <a:buChar char="§"/>
             </a:pPr>
             <a:r>
-              <a:rPr lang="pt-BR" sz="2000" dirty="0">
+              <a:rPr lang="pt-BR" sz="2000" b="1" dirty="0">
                 <a:solidFill>
                   <a:schemeClr val="tx1"/>
                 </a:solidFill>
@@ -7694,7 +7694,7 @@
               <a:buChar char="§"/>
             </a:pPr>
             <a:r>
-              <a:rPr lang="pt-BR" sz="2000" dirty="0">
+              <a:rPr lang="pt-BR" sz="2000" b="1" dirty="0">
                 <a:solidFill>
                   <a:schemeClr val="tx1"/>
                 </a:solidFill>
@@ -7710,7 +7710,7 @@
               <a:buChar char="§"/>
             </a:pPr>
             <a:r>
-              <a:rPr lang="pt-BR" sz="2000" dirty="0">
+              <a:rPr lang="pt-BR" sz="2000" b="1" dirty="0">
                 <a:solidFill>
                   <a:schemeClr val="tx1"/>
                 </a:solidFill>
@@ -8322,8 +8322,8 @@
         </p:nvSpPr>
         <p:spPr>
           <a:xfrm>
-            <a:off x="142865" y="1200150"/>
-            <a:ext cx="8865056" cy="3737370"/>
+            <a:off x="142865" y="1092574"/>
+            <a:ext cx="8865056" cy="3844946"/>
           </a:xfrm>
         </p:spPr>
         <p:txBody>
@@ -8337,7 +8337,7 @@
               <a:buChar char="§"/>
             </a:pPr>
             <a:r>
-              <a:rPr lang="pt-BR" sz="2000" dirty="0">
+              <a:rPr lang="pt-BR" sz="1800" dirty="0">
                 <a:solidFill>
                   <a:schemeClr val="tx1"/>
                 </a:solidFill>
@@ -8347,7 +8347,7 @@
               <a:t>Arduíno (</a:t>
             </a:r>
             <a:r>
-              <a:rPr lang="pt-BR" sz="2000" b="1" dirty="0">
+              <a:rPr lang="pt-BR" sz="1800" b="1" dirty="0">
                 <a:solidFill>
                   <a:srgbClr val="FF0000"/>
                 </a:solidFill>
@@ -8357,7 +8357,7 @@
               <a:t>Windows, Linux, Mac OS</a:t>
             </a:r>
             <a:r>
-              <a:rPr lang="pt-BR" sz="2000" dirty="0">
+              <a:rPr lang="pt-BR" sz="1800" dirty="0">
                 <a:solidFill>
                   <a:schemeClr val="tx1"/>
                 </a:solidFill>
@@ -8367,7 +8367,7 @@
               <a:t>). </a:t>
             </a:r>
             <a:r>
-              <a:rPr lang="pt-BR" sz="2000" b="1" dirty="0">
+              <a:rPr lang="pt-BR" sz="1800" b="1" dirty="0">
                 <a:solidFill>
                   <a:schemeClr val="tx1"/>
                 </a:solidFill>
@@ -8383,7 +8383,7 @@
               <a:buChar char="§"/>
             </a:pPr>
             <a:r>
-              <a:rPr lang="pt-BR" sz="2000" dirty="0" err="1">
+              <a:rPr lang="pt-BR" sz="1800" dirty="0" err="1">
                 <a:solidFill>
                   <a:schemeClr val="tx1"/>
                 </a:solidFill>
@@ -8393,7 +8393,7 @@
               <a:t>Raspberry</a:t>
             </a:r>
             <a:r>
-              <a:rPr lang="pt-BR" sz="2000" dirty="0">
+              <a:rPr lang="pt-BR" sz="1800" dirty="0">
                 <a:solidFill>
                   <a:schemeClr val="tx1"/>
                 </a:solidFill>
@@ -8403,7 +8403,7 @@
               <a:t> PI (</a:t>
             </a:r>
             <a:r>
-              <a:rPr lang="pt-BR" sz="2000" b="1" dirty="0">
+              <a:rPr lang="pt-BR" sz="1800" b="1" dirty="0">
                 <a:solidFill>
                   <a:srgbClr val="FF0000"/>
                 </a:solidFill>
@@ -8413,7 +8413,7 @@
               <a:t>Linux</a:t>
             </a:r>
             <a:r>
-              <a:rPr lang="pt-BR" sz="2000" dirty="0">
+              <a:rPr lang="pt-BR" sz="1800" dirty="0">
                 <a:solidFill>
                   <a:schemeClr val="tx1"/>
                 </a:solidFill>
@@ -8429,7 +8429,7 @@
               <a:buChar char="§"/>
             </a:pPr>
             <a:r>
-              <a:rPr lang="pt-BR" sz="2000" dirty="0">
+              <a:rPr lang="pt-BR" sz="1800" dirty="0">
                 <a:solidFill>
                   <a:schemeClr val="tx1"/>
                 </a:solidFill>
@@ -8439,7 +8439,7 @@
               <a:t>Intel Edison (</a:t>
             </a:r>
             <a:r>
-              <a:rPr lang="pt-BR" sz="2000" b="1" dirty="0">
+              <a:rPr lang="pt-BR" sz="1800" b="1" dirty="0">
                 <a:solidFill>
                   <a:srgbClr val="FF0000"/>
                 </a:solidFill>
@@ -8449,7 +8449,7 @@
               <a:t>Windows</a:t>
             </a:r>
             <a:r>
-              <a:rPr lang="pt-BR" sz="2000" dirty="0">
+              <a:rPr lang="pt-BR" sz="1800" dirty="0">
                 <a:solidFill>
                   <a:schemeClr val="tx1"/>
                 </a:solidFill>
@@ -8465,7 +8465,7 @@
               <a:buChar char="§"/>
             </a:pPr>
             <a:r>
-              <a:rPr lang="pt-BR" sz="2000" dirty="0" err="1">
+              <a:rPr lang="pt-BR" sz="1800" dirty="0" err="1">
                 <a:solidFill>
                   <a:schemeClr val="tx1"/>
                 </a:solidFill>
@@ -8475,7 +8475,7 @@
               <a:t>Tinkercard</a:t>
             </a:r>
             <a:r>
-              <a:rPr lang="pt-BR" sz="2000" dirty="0">
+              <a:rPr lang="pt-BR" sz="1800" dirty="0">
                 <a:solidFill>
                   <a:schemeClr val="tx1"/>
                 </a:solidFill>
@@ -8485,7 +8485,7 @@
               <a:t> (</a:t>
             </a:r>
             <a:r>
-              <a:rPr lang="pt-BR" sz="2000" b="1" dirty="0">
+              <a:rPr lang="pt-BR" sz="1800" b="1" dirty="0">
                 <a:solidFill>
                   <a:srgbClr val="FF0000"/>
                 </a:solidFill>
@@ -8495,7 +8495,7 @@
               <a:t>Arduíno</a:t>
             </a:r>
             <a:r>
-              <a:rPr lang="pt-BR" sz="2000" dirty="0">
+              <a:rPr lang="pt-BR" sz="1800" dirty="0">
                 <a:solidFill>
                   <a:schemeClr val="tx1"/>
                 </a:solidFill>
@@ -8510,7 +8510,7 @@
               <a:buNone/>
             </a:pPr>
             <a:r>
-              <a:rPr lang="pt-BR" sz="2000" dirty="0">
+              <a:rPr lang="pt-BR" sz="1800" dirty="0">
                 <a:solidFill>
                   <a:schemeClr val="tx1"/>
                 </a:solidFill>
@@ -8520,7 +8520,7 @@
               <a:t>	(</a:t>
             </a:r>
             <a:r>
-              <a:rPr lang="pt-BR" sz="2000" dirty="0">
+              <a:rPr lang="pt-BR" sz="1800" dirty="0">
                 <a:solidFill>
                   <a:schemeClr val="tx1"/>
                 </a:solidFill>
@@ -8531,7 +8531,7 @@
               <a:t>https://www.tinkercad.com/</a:t>
             </a:r>
             <a:r>
-              <a:rPr lang="pt-BR" sz="2000" dirty="0" err="1">
+              <a:rPr lang="pt-BR" sz="1800" dirty="0" err="1">
                 <a:solidFill>
                   <a:schemeClr val="tx1"/>
                 </a:solidFill>
@@ -8542,7 +8542,7 @@
               <a:t>things</a:t>
             </a:r>
             <a:r>
-              <a:rPr lang="pt-BR" sz="2000" dirty="0">
+              <a:rPr lang="pt-BR" sz="1800" dirty="0">
                 <a:solidFill>
                   <a:schemeClr val="tx1"/>
                 </a:solidFill>
@@ -8553,7 +8553,7 @@
               <a:t>/aSBH9ShfJ80-iot-project-</a:t>
             </a:r>
             <a:r>
-              <a:rPr lang="pt-BR" sz="2000" dirty="0">
+              <a:rPr lang="pt-BR" sz="1800" dirty="0">
                 <a:solidFill>
                   <a:schemeClr val="tx1"/>
                 </a:solidFill>
@@ -8567,7 +8567,7 @@
             <a:pPr marL="0" indent="0" algn="just">
               <a:buNone/>
             </a:pPr>
-            <a:endParaRPr lang="pt-BR" sz="2000" dirty="0">
+            <a:endParaRPr lang="pt-BR" sz="1800" dirty="0">
               <a:solidFill>
                 <a:schemeClr val="tx1"/>
               </a:solidFill>
@@ -8580,7 +8580,7 @@
               <a:buNone/>
             </a:pPr>
             <a:r>
-              <a:rPr lang="pt-BR" sz="2000" b="1" dirty="0">
+              <a:rPr lang="pt-BR" sz="1800" b="1" dirty="0">
                 <a:solidFill>
                   <a:srgbClr val="FF0000"/>
                 </a:solidFill>
@@ -8590,7 +8590,7 @@
               <a:t>Outro Tipo de Plataforma</a:t>
             </a:r>
             <a:r>
-              <a:rPr lang="pt-BR" sz="2000" dirty="0">
+              <a:rPr lang="pt-BR" sz="1800" dirty="0">
                 <a:solidFill>
                   <a:schemeClr val="tx1"/>
                 </a:solidFill>
@@ -8605,28 +8605,48 @@
               <a:buNone/>
             </a:pPr>
             <a:r>
-              <a:rPr lang="pt-BR" sz="2000" dirty="0">
+              <a:rPr lang="pt-BR" sz="1800" dirty="0">
                 <a:solidFill>
                   <a:schemeClr val="tx1"/>
                 </a:solidFill>
                 <a:latin typeface="Times New Roman" panose="02020603050405020304" pitchFamily="18" charset="0"/>
                 <a:cs typeface="Times New Roman" panose="02020603050405020304" pitchFamily="18" charset="0"/>
               </a:rPr>
-              <a:t>	THINGSBOARD (</a:t>
-            </a:r>
-            <a:r>
-              <a:rPr lang="pt-BR" sz="2000" dirty="0">
+              <a:t>	</a:t>
+            </a:r>
+            <a:r>
+              <a:rPr lang="pt-BR" sz="1800" b="1" dirty="0">
                 <a:solidFill>
                   <a:schemeClr val="tx1"/>
                 </a:solidFill>
                 <a:latin typeface="Times New Roman" panose="02020603050405020304" pitchFamily="18" charset="0"/>
                 <a:cs typeface="Times New Roman" panose="02020603050405020304" pitchFamily="18" charset="0"/>
+              </a:rPr>
+              <a:t>THINGSBOARD</a:t>
+            </a:r>
+            <a:r>
+              <a:rPr lang="pt-BR" sz="1800" dirty="0">
+                <a:solidFill>
+                  <a:schemeClr val="tx1"/>
+                </a:solidFill>
+                <a:latin typeface="Times New Roman" panose="02020603050405020304" pitchFamily="18" charset="0"/>
+                <a:cs typeface="Times New Roman" panose="02020603050405020304" pitchFamily="18" charset="0"/>
+              </a:rPr>
+              <a:t> (</a:t>
+            </a:r>
+            <a:r>
+              <a:rPr lang="pt-BR" sz="1800" dirty="0">
+                <a:solidFill>
+                  <a:schemeClr val="tx1"/>
+                </a:solidFill>
+                <a:latin typeface="Times New Roman" panose="02020603050405020304" pitchFamily="18" charset="0"/>
+                <a:cs typeface="Times New Roman" panose="02020603050405020304" pitchFamily="18" charset="0"/>
                 <a:hlinkClick r:id="rId4"/>
               </a:rPr>
               <a:t>https://thingsboard.io/</a:t>
             </a:r>
             <a:r>
-              <a:rPr lang="pt-BR" sz="2000" dirty="0">
+              <a:rPr lang="pt-BR" sz="1800" dirty="0">
                 <a:solidFill>
                   <a:schemeClr val="tx1"/>
                 </a:solidFill>
@@ -8640,13 +8660,68 @@
             <a:pPr marL="0" indent="0" algn="just">
               <a:buNone/>
             </a:pPr>
-            <a:endParaRPr lang="pt-BR" sz="2000" dirty="0">
+            <a:endParaRPr lang="pt-BR" sz="1400" dirty="0">
               <a:solidFill>
                 <a:schemeClr val="tx1"/>
               </a:solidFill>
               <a:latin typeface="Times New Roman" panose="02020603050405020304" pitchFamily="18" charset="0"/>
               <a:cs typeface="Times New Roman" panose="02020603050405020304" pitchFamily="18" charset="0"/>
             </a:endParaRPr>
+          </a:p>
+          <a:p>
+            <a:pPr marL="0" indent="0" algn="just">
+              <a:buNone/>
+            </a:pPr>
+            <a:r>
+              <a:rPr lang="pt-BR" sz="1400" dirty="0">
+                <a:solidFill>
+                  <a:schemeClr val="tx1"/>
+                </a:solidFill>
+                <a:latin typeface="Times New Roman" panose="02020603050405020304" pitchFamily="18" charset="0"/>
+                <a:cs typeface="Times New Roman" panose="02020603050405020304" pitchFamily="18" charset="0"/>
+              </a:rPr>
+              <a:t>	O </a:t>
+            </a:r>
+            <a:r>
+              <a:rPr lang="pt-BR" sz="1400" dirty="0" err="1">
+                <a:solidFill>
+                  <a:schemeClr val="tx1"/>
+                </a:solidFill>
+                <a:latin typeface="Times New Roman" panose="02020603050405020304" pitchFamily="18" charset="0"/>
+                <a:cs typeface="Times New Roman" panose="02020603050405020304" pitchFamily="18" charset="0"/>
+              </a:rPr>
+              <a:t>ThingsBoard</a:t>
+            </a:r>
+            <a:r>
+              <a:rPr lang="pt-BR" sz="1400" dirty="0">
+                <a:solidFill>
+                  <a:schemeClr val="tx1"/>
+                </a:solidFill>
+                <a:latin typeface="Times New Roman" panose="02020603050405020304" pitchFamily="18" charset="0"/>
+                <a:cs typeface="Times New Roman" panose="02020603050405020304" pitchFamily="18" charset="0"/>
+              </a:rPr>
+              <a:t> é uma plataforma que recebe dados de dispositivos IoT, processa essas informações e mostra tudo em painéis e dashboards para monitoramento e automação. Arquitetura de um projeto com </a:t>
+            </a:r>
+            <a:r>
+              <a:rPr lang="pt-BR" sz="1400" dirty="0" err="1">
+                <a:solidFill>
+                  <a:schemeClr val="tx1"/>
+                </a:solidFill>
+                <a:latin typeface="Times New Roman" panose="02020603050405020304" pitchFamily="18" charset="0"/>
+                <a:cs typeface="Times New Roman" panose="02020603050405020304" pitchFamily="18" charset="0"/>
+              </a:rPr>
+              <a:t>ThingsBoard</a:t>
+            </a:r>
+            <a:r>
+              <a:rPr lang="pt-BR" sz="1400" dirty="0">
+                <a:solidFill>
+                  <a:schemeClr val="tx1"/>
+                </a:solidFill>
+                <a:latin typeface="Times New Roman" panose="02020603050405020304" pitchFamily="18" charset="0"/>
+                <a:cs typeface="Times New Roman" panose="02020603050405020304" pitchFamily="18" charset="0"/>
+              </a:rPr>
+              <a:t> (ESP32 + MQTT + Dashboard).</a:t>
+            </a:r>
           </a:p>
         </p:txBody>
       </p:sp>
@@ -8999,8 +9074,25 @@
                 <a:latin typeface="Times New Roman" panose="02020603050405020304" pitchFamily="18" charset="0"/>
                 <a:cs typeface="Times New Roman" panose="02020603050405020304" pitchFamily="18" charset="0"/>
               </a:rPr>
-              <a:t>)</a:t>
-            </a:r>
+              <a:t>) - </a:t>
+            </a:r>
+            <a:r>
+              <a:rPr lang="pt-BR" sz="2000" b="1" dirty="0" err="1">
+                <a:solidFill>
+                  <a:srgbClr val="FF0000"/>
+                </a:solidFill>
+                <a:latin typeface="Times New Roman" panose="02020603050405020304" pitchFamily="18" charset="0"/>
+                <a:cs typeface="Times New Roman" panose="02020603050405020304" pitchFamily="18" charset="0"/>
+              </a:rPr>
+              <a:t>opensource</a:t>
+            </a:r>
+            <a:endParaRPr lang="pt-BR" sz="2000" dirty="0">
+              <a:solidFill>
+                <a:schemeClr val="tx1"/>
+              </a:solidFill>
+              <a:latin typeface="Times New Roman" panose="02020603050405020304" pitchFamily="18" charset="0"/>
+              <a:cs typeface="Times New Roman" panose="02020603050405020304" pitchFamily="18" charset="0"/>
+            </a:endParaRPr>
           </a:p>
         </p:txBody>
       </p:sp>
@@ -11811,8 +11903,8 @@
         </p:nvSpPr>
         <p:spPr>
           <a:xfrm>
-            <a:off x="139472" y="1200150"/>
-            <a:ext cx="8865056" cy="3737370"/>
+            <a:off x="139472" y="893318"/>
+            <a:ext cx="8865056" cy="4189670"/>
           </a:xfrm>
         </p:spPr>
         <p:txBody>
@@ -11825,7 +11917,7 @@
               <a:buNone/>
             </a:pPr>
             <a:r>
-              <a:rPr lang="pt-BR" sz="2400" dirty="0">
+              <a:rPr lang="pt-BR" sz="1800" dirty="0">
                 <a:latin typeface="Times New Roman" panose="02020603050405020304" pitchFamily="18" charset="0"/>
                 <a:cs typeface="Times New Roman" panose="02020603050405020304" pitchFamily="18" charset="0"/>
               </a:rPr>
@@ -11837,7 +11929,7 @@
               <a:buNone/>
             </a:pPr>
             <a:r>
-              <a:rPr lang="pt-BR" sz="2400" b="1" dirty="0">
+              <a:rPr lang="pt-BR" sz="1800" b="1" dirty="0">
                 <a:solidFill>
                   <a:srgbClr val="FF0000"/>
                 </a:solidFill>
@@ -11847,14 +11939,14 @@
               <a:t>Disponível em: </a:t>
             </a:r>
             <a:r>
-              <a:rPr lang="pt-BR" sz="2400" dirty="0">
+              <a:rPr lang="pt-BR" sz="1800" dirty="0">
                 <a:latin typeface="Times New Roman" panose="02020603050405020304" pitchFamily="18" charset="0"/>
                 <a:cs typeface="Times New Roman" panose="02020603050405020304" pitchFamily="18" charset="0"/>
                 <a:hlinkClick r:id="rId3"/>
               </a:rPr>
               <a:t>https://youtu.be/m6deMoGpJgQ</a:t>
             </a:r>
-            <a:endParaRPr lang="pt-BR" sz="2400" dirty="0">
+            <a:endParaRPr lang="pt-BR" sz="1800" dirty="0">
               <a:latin typeface="Times New Roman" panose="02020603050405020304" pitchFamily="18" charset="0"/>
               <a:cs typeface="Times New Roman" panose="02020603050405020304" pitchFamily="18" charset="0"/>
             </a:endParaRPr>
@@ -11864,21 +11956,21 @@
               <a:buNone/>
             </a:pPr>
             <a:r>
-              <a:rPr lang="pt-BR" sz="2400" dirty="0">
+              <a:rPr lang="pt-BR" sz="1800" dirty="0">
                 <a:latin typeface="Times New Roman" panose="02020603050405020304" pitchFamily="18" charset="0"/>
                 <a:cs typeface="Times New Roman" panose="02020603050405020304" pitchFamily="18" charset="0"/>
               </a:rPr>
               <a:t>				 </a:t>
             </a:r>
             <a:r>
-              <a:rPr lang="pt-BR" sz="2400" dirty="0">
+              <a:rPr lang="pt-BR" sz="1800" dirty="0">
                 <a:latin typeface="Times New Roman" panose="02020603050405020304" pitchFamily="18" charset="0"/>
                 <a:cs typeface="Times New Roman" panose="02020603050405020304" pitchFamily="18" charset="0"/>
                 <a:hlinkClick r:id="rId4"/>
               </a:rPr>
               <a:t>https://youtu.be/5ewQBi1rx58</a:t>
             </a:r>
-            <a:endParaRPr lang="pt-BR" sz="2400" dirty="0">
+            <a:endParaRPr lang="pt-BR" sz="1800" dirty="0">
               <a:latin typeface="Times New Roman" panose="02020603050405020304" pitchFamily="18" charset="0"/>
               <a:cs typeface="Times New Roman" panose="02020603050405020304" pitchFamily="18" charset="0"/>
             </a:endParaRPr>
@@ -11887,7 +11979,7 @@
             <a:pPr marL="0" indent="0" algn="just">
               <a:buNone/>
             </a:pPr>
-            <a:endParaRPr lang="pt-BR" sz="2400" dirty="0">
+            <a:endParaRPr lang="pt-BR" sz="1800" dirty="0">
               <a:latin typeface="Times New Roman" panose="02020603050405020304" pitchFamily="18" charset="0"/>
               <a:cs typeface="Times New Roman" panose="02020603050405020304" pitchFamily="18" charset="0"/>
             </a:endParaRPr>
@@ -11897,7 +11989,7 @@
               <a:buNone/>
             </a:pPr>
             <a:r>
-              <a:rPr lang="pt-BR" sz="2400" dirty="0">
+              <a:rPr lang="pt-BR" sz="1800" dirty="0">
                 <a:latin typeface="Times New Roman" panose="02020603050405020304" pitchFamily="18" charset="0"/>
                 <a:cs typeface="Times New Roman" panose="02020603050405020304" pitchFamily="18" charset="0"/>
               </a:rPr>
@@ -11909,7 +12001,7 @@
               <a:buNone/>
             </a:pPr>
             <a:r>
-              <a:rPr lang="pt-BR" sz="2400" b="1" dirty="0">
+              <a:rPr lang="pt-BR" sz="1800" b="1" dirty="0">
                 <a:solidFill>
                   <a:srgbClr val="FF0000"/>
                 </a:solidFill>
@@ -11919,14 +12011,14 @@
               <a:t>Disponível em: </a:t>
             </a:r>
             <a:r>
-              <a:rPr lang="pt-BR" sz="2400" dirty="0">
+              <a:rPr lang="pt-BR" sz="1800" dirty="0">
                 <a:latin typeface="Times New Roman" panose="02020603050405020304" pitchFamily="18" charset="0"/>
                 <a:cs typeface="Times New Roman" panose="02020603050405020304" pitchFamily="18" charset="0"/>
                 <a:hlinkClick r:id="rId5"/>
               </a:rPr>
               <a:t>https://youtu.be/-tDGzwsBokY</a:t>
             </a:r>
-            <a:endParaRPr lang="pt-BR" sz="2400" dirty="0">
+            <a:endParaRPr lang="pt-BR" sz="1800" dirty="0">
               <a:latin typeface="Times New Roman" panose="02020603050405020304" pitchFamily="18" charset="0"/>
               <a:cs typeface="Times New Roman" panose="02020603050405020304" pitchFamily="18" charset="0"/>
             </a:endParaRPr>
@@ -11936,21 +12028,21 @@
               <a:buNone/>
             </a:pPr>
             <a:r>
-              <a:rPr lang="pt-BR" sz="2400" dirty="0">
+              <a:rPr lang="pt-BR" sz="1800" dirty="0">
                 <a:latin typeface="Times New Roman" panose="02020603050405020304" pitchFamily="18" charset="0"/>
                 <a:cs typeface="Times New Roman" panose="02020603050405020304" pitchFamily="18" charset="0"/>
               </a:rPr>
               <a:t>				 </a:t>
             </a:r>
             <a:r>
-              <a:rPr lang="pt-BR" sz="2400" dirty="0">
+              <a:rPr lang="pt-BR" sz="1800" dirty="0">
                 <a:latin typeface="Times New Roman" panose="02020603050405020304" pitchFamily="18" charset="0"/>
                 <a:cs typeface="Times New Roman" panose="02020603050405020304" pitchFamily="18" charset="0"/>
                 <a:hlinkClick r:id="rId6"/>
               </a:rPr>
               <a:t>https://www.youtube.com/watch?v=Ikvs6B2591M</a:t>
             </a:r>
-            <a:endParaRPr lang="pt-BR" sz="2400" dirty="0">
+            <a:endParaRPr lang="pt-BR" sz="1800" dirty="0">
               <a:latin typeface="Times New Roman" panose="02020603050405020304" pitchFamily="18" charset="0"/>
               <a:cs typeface="Times New Roman" panose="02020603050405020304" pitchFamily="18" charset="0"/>
             </a:endParaRPr>
@@ -11959,7 +12051,7 @@
             <a:pPr marL="0" indent="0" algn="just">
               <a:buNone/>
             </a:pPr>
-            <a:endParaRPr lang="pt-BR" sz="2400" dirty="0">
+            <a:endParaRPr lang="pt-BR" sz="1800" dirty="0">
               <a:latin typeface="Times New Roman" panose="02020603050405020304" pitchFamily="18" charset="0"/>
               <a:cs typeface="Times New Roman" panose="02020603050405020304" pitchFamily="18" charset="0"/>
             </a:endParaRPr>
@@ -11968,7 +12060,89 @@
             <a:pPr marL="0" indent="0" algn="just">
               <a:buNone/>
             </a:pPr>
-            <a:endParaRPr lang="pt-BR" sz="2400" dirty="0">
+            <a:r>
+              <a:rPr lang="pt-BR" sz="1800" dirty="0">
+                <a:latin typeface="Times New Roman" panose="02020603050405020304" pitchFamily="18" charset="0"/>
+                <a:cs typeface="Times New Roman" panose="02020603050405020304" pitchFamily="18" charset="0"/>
+              </a:rPr>
+              <a:t>[3] Formação IoT com ESP32 e </a:t>
+            </a:r>
+            <a:r>
+              <a:rPr lang="pt-BR" sz="1800" dirty="0" err="1">
+                <a:latin typeface="Times New Roman" panose="02020603050405020304" pitchFamily="18" charset="0"/>
+                <a:cs typeface="Times New Roman" panose="02020603050405020304" pitchFamily="18" charset="0"/>
+              </a:rPr>
+              <a:t>Raspberry</a:t>
+            </a:r>
+            <a:r>
+              <a:rPr lang="pt-BR" sz="1800" dirty="0">
+                <a:latin typeface="Times New Roman" panose="02020603050405020304" pitchFamily="18" charset="0"/>
+                <a:cs typeface="Times New Roman" panose="02020603050405020304" pitchFamily="18" charset="0"/>
+              </a:rPr>
+              <a:t> PI, Assinatura plataforma IoT </a:t>
+            </a:r>
+            <a:r>
+              <a:rPr lang="pt-BR" sz="1800" dirty="0" err="1">
+                <a:latin typeface="Times New Roman" panose="02020603050405020304" pitchFamily="18" charset="0"/>
+                <a:cs typeface="Times New Roman" panose="02020603050405020304" pitchFamily="18" charset="0"/>
+              </a:rPr>
+              <a:t>geniot</a:t>
+            </a:r>
+            <a:r>
+              <a:rPr lang="pt-BR" sz="1800" dirty="0">
+                <a:latin typeface="Times New Roman" panose="02020603050405020304" pitchFamily="18" charset="0"/>
+                <a:cs typeface="Times New Roman" panose="02020603050405020304" pitchFamily="18" charset="0"/>
+              </a:rPr>
+              <a:t>. </a:t>
+            </a:r>
+          </a:p>
+          <a:p>
+            <a:pPr marL="0" indent="0" algn="just">
+              <a:buNone/>
+            </a:pPr>
+            <a:r>
+              <a:rPr lang="pt-BR" sz="1800" dirty="0">
+                <a:latin typeface="Times New Roman" panose="02020603050405020304" pitchFamily="18" charset="0"/>
+                <a:cs typeface="Times New Roman" panose="02020603050405020304" pitchFamily="18" charset="0"/>
+                <a:hlinkClick r:id="rId7"/>
+              </a:rPr>
+              <a:t>https://www.microgenios.com.br/</a:t>
+            </a:r>
+            <a:endParaRPr lang="pt-BR" sz="1800" dirty="0">
+              <a:latin typeface="Times New Roman" panose="02020603050405020304" pitchFamily="18" charset="0"/>
+              <a:cs typeface="Times New Roman" panose="02020603050405020304" pitchFamily="18" charset="0"/>
+            </a:endParaRPr>
+          </a:p>
+          <a:p>
+            <a:pPr marL="0" indent="0" algn="just">
+              <a:buNone/>
+            </a:pPr>
+            <a:r>
+              <a:rPr lang="pt-BR" sz="1800" dirty="0">
+                <a:latin typeface="Times New Roman" panose="02020603050405020304" pitchFamily="18" charset="0"/>
+                <a:cs typeface="Times New Roman" panose="02020603050405020304" pitchFamily="18" charset="0"/>
+                <a:hlinkClick r:id="rId8"/>
+              </a:rPr>
+              <a:t>https://microgeniosacademy.com.br/</a:t>
+            </a:r>
+            <a:endParaRPr lang="pt-BR" sz="1800" dirty="0">
+              <a:latin typeface="Times New Roman" panose="02020603050405020304" pitchFamily="18" charset="0"/>
+              <a:cs typeface="Times New Roman" panose="02020603050405020304" pitchFamily="18" charset="0"/>
+            </a:endParaRPr>
+          </a:p>
+          <a:p>
+            <a:pPr marL="0" indent="0" algn="just">
+              <a:buNone/>
+            </a:pPr>
+            <a:r>
+              <a:rPr lang="pt-BR" sz="1800" dirty="0">
+                <a:latin typeface="Times New Roman" panose="02020603050405020304" pitchFamily="18" charset="0"/>
+                <a:cs typeface="Times New Roman" panose="02020603050405020304" pitchFamily="18" charset="0"/>
+                <a:hlinkClick r:id="rId9"/>
+              </a:rPr>
+              <a:t>https://www.lettercount.com/</a:t>
+            </a:r>
+            <a:endParaRPr lang="pt-BR" sz="1800" dirty="0">
               <a:latin typeface="Times New Roman" panose="02020603050405020304" pitchFamily="18" charset="0"/>
               <a:cs typeface="Times New Roman" panose="02020603050405020304" pitchFamily="18" charset="0"/>
             </a:endParaRPr>
